--- a/fixtures/chapters.pptx
+++ b/fixtures/chapters.pptx
@@ -68,7 +68,7 @@
         <p:txBody>
           <a:bodyPr/>
           <a:p>
-            <a:fld id="{4618697D-302C-46B7-87D1-6C4085DE8813}" type="slidenum">
+            <a:fld id="{22814214-C9D8-4B5A-BEBA-6847EF3C9426}" type="slidenum">
               <a:t>&lt;#&gt;</a:t>
             </a:fld>
           </a:p>
@@ -277,7 +277,7 @@
         <p:txBody>
           <a:bodyPr/>
           <a:p>
-            <a:fld id="{1C84FC4C-D73D-4B8F-9485-AD1D8C9AC50F}" type="slidenum">
+            <a:fld id="{4DD502EB-17D8-448D-9A9B-124B13F4357B}" type="slidenum">
               <a:t>&lt;#&gt;</a:t>
             </a:fld>
           </a:p>
@@ -572,7 +572,7 @@
         <p:txBody>
           <a:bodyPr/>
           <a:p>
-            <a:fld id="{67746A5C-F284-4FC5-A361-91230C65EE10}" type="slidenum">
+            <a:fld id="{447E3C24-065D-4D10-B315-8FA9DBC0A5D7}" type="slidenum">
               <a:t>&lt;#&gt;</a:t>
             </a:fld>
           </a:p>
@@ -953,7 +953,7 @@
         <p:txBody>
           <a:bodyPr/>
           <a:p>
-            <a:fld id="{610761C0-37E0-45FF-BFF0-332D29D983E4}" type="slidenum">
+            <a:fld id="{5DDB1DA7-E774-4366-87D2-C23D65D6FBA9}" type="slidenum">
               <a:t>&lt;#&gt;</a:t>
             </a:fld>
           </a:p>
@@ -1116,7 +1116,7 @@
         <p:txBody>
           <a:bodyPr/>
           <a:p>
-            <a:fld id="{B4FE382E-E977-472B-AB32-5D0EAE2AA002}" type="slidenum">
+            <a:fld id="{80B07135-6614-4F49-B475-52E8781C2C6A}" type="slidenum">
               <a:t>&lt;#&gt;</a:t>
             </a:fld>
           </a:p>
@@ -1282,7 +1282,7 @@
         <p:txBody>
           <a:bodyPr/>
           <a:p>
-            <a:fld id="{1A388833-CB74-4A38-ADD6-BAE50AD285D4}" type="slidenum">
+            <a:fld id="{7666FE31-2765-4139-93F4-A867E190433D}" type="slidenum">
               <a:t>&lt;#&gt;</a:t>
             </a:fld>
           </a:p>
@@ -1491,7 +1491,7 @@
         <p:txBody>
           <a:bodyPr/>
           <a:p>
-            <a:fld id="{90FC3B84-C3C1-4657-AAF2-5E26D4FAB647}" type="slidenum">
+            <a:fld id="{5744CFCC-A8AA-42EE-8C7A-9E3B838BA3A7}" type="slidenum">
               <a:t>&lt;#&gt;</a:t>
             </a:fld>
           </a:p>
@@ -1614,7 +1614,7 @@
         <p:txBody>
           <a:bodyPr/>
           <a:p>
-            <a:fld id="{117F96EF-B3F1-4C5A-96EE-1FEB0E24AE44}" type="slidenum">
+            <a:fld id="{AC877F98-E8F0-4BFA-8BFF-28DF41570D07}" type="slidenum">
               <a:t>&lt;#&gt;</a:t>
             </a:fld>
           </a:p>
@@ -1735,7 +1735,7 @@
         <p:txBody>
           <a:bodyPr/>
           <a:p>
-            <a:fld id="{FBCBC159-449C-419E-9044-C2ED9DEC1211}" type="slidenum">
+            <a:fld id="{02322E55-00A5-48C3-B149-69A404248395}" type="slidenum">
               <a:t>&lt;#&gt;</a:t>
             </a:fld>
           </a:p>
@@ -1987,7 +1987,7 @@
         <p:txBody>
           <a:bodyPr/>
           <a:p>
-            <a:fld id="{6C5A888A-DC3E-4F21-82EB-9FF3253E3A0B}" type="slidenum">
+            <a:fld id="{5E690934-44A7-4669-95E5-D6A33ADCC971}" type="slidenum">
               <a:t>&lt;#&gt;</a:t>
             </a:fld>
           </a:p>
@@ -2239,7 +2239,7 @@
         <p:txBody>
           <a:bodyPr/>
           <a:p>
-            <a:fld id="{8D42D115-3B86-4B82-9D44-D7DE6D075591}" type="slidenum">
+            <a:fld id="{6A1DA204-26B4-41C5-90D0-082BF59E61F7}" type="slidenum">
               <a:t>&lt;#&gt;</a:t>
             </a:fld>
           </a:p>
@@ -2491,7 +2491,7 @@
         <p:txBody>
           <a:bodyPr/>
           <a:p>
-            <a:fld id="{5EDEF883-5996-4869-9DC7-3700A526910D}" type="slidenum">
+            <a:fld id="{38BE94CF-57A1-4804-8B6D-3069EA05C947}" type="slidenum">
               <a:t>&lt;#&gt;</a:t>
             </a:fld>
           </a:p>
@@ -2976,7 +2976,7 @@
             <a:pPr indent="0" algn="r">
               <a:buNone/>
             </a:pPr>
-            <a:fld id="{05556EDF-81F6-481D-9920-C3B36C2F0AB7}" type="slidenum">
+            <a:fld id="{05C00500-1543-4F68-9344-9A3F9B9F33EC}" type="slidenum">
               <a:rPr b="0" lang="en-US" sz="1400" spc="-1" strike="noStrike">
                 <a:solidFill>
                   <a:srgbClr val="000000"/>

--- a/fixtures/chapters.pptx
+++ b/fixtures/chapters.pptx
@@ -68,7 +68,7 @@
         <p:txBody>
           <a:bodyPr/>
           <a:p>
-            <a:fld id="{22814214-C9D8-4B5A-BEBA-6847EF3C9426}" type="slidenum">
+            <a:fld id="{2D420253-7BE9-442B-A436-54F9EC1A68C6}" type="slidenum">
               <a:t>&lt;#&gt;</a:t>
             </a:fld>
           </a:p>
@@ -277,7 +277,7 @@
         <p:txBody>
           <a:bodyPr/>
           <a:p>
-            <a:fld id="{4DD502EB-17D8-448D-9A9B-124B13F4357B}" type="slidenum">
+            <a:fld id="{C28A1B5F-A184-4AB3-BAB2-B859C5449399}" type="slidenum">
               <a:t>&lt;#&gt;</a:t>
             </a:fld>
           </a:p>
@@ -572,7 +572,7 @@
         <p:txBody>
           <a:bodyPr/>
           <a:p>
-            <a:fld id="{447E3C24-065D-4D10-B315-8FA9DBC0A5D7}" type="slidenum">
+            <a:fld id="{6D31A1D0-844A-4A64-A35E-B695A9B96993}" type="slidenum">
               <a:t>&lt;#&gt;</a:t>
             </a:fld>
           </a:p>
@@ -953,7 +953,7 @@
         <p:txBody>
           <a:bodyPr/>
           <a:p>
-            <a:fld id="{5DDB1DA7-E774-4366-87D2-C23D65D6FBA9}" type="slidenum">
+            <a:fld id="{48720CDC-FDF8-40F1-896D-577B348353EF}" type="slidenum">
               <a:t>&lt;#&gt;</a:t>
             </a:fld>
           </a:p>
@@ -1116,7 +1116,7 @@
         <p:txBody>
           <a:bodyPr/>
           <a:p>
-            <a:fld id="{80B07135-6614-4F49-B475-52E8781C2C6A}" type="slidenum">
+            <a:fld id="{42E8D436-E4F1-49B2-99A4-87DD16A197CB}" type="slidenum">
               <a:t>&lt;#&gt;</a:t>
             </a:fld>
           </a:p>
@@ -1282,7 +1282,7 @@
         <p:txBody>
           <a:bodyPr/>
           <a:p>
-            <a:fld id="{7666FE31-2765-4139-93F4-A867E190433D}" type="slidenum">
+            <a:fld id="{B3443551-6A33-43C5-820A-2C3C541187AD}" type="slidenum">
               <a:t>&lt;#&gt;</a:t>
             </a:fld>
           </a:p>
@@ -1491,7 +1491,7 @@
         <p:txBody>
           <a:bodyPr/>
           <a:p>
-            <a:fld id="{5744CFCC-A8AA-42EE-8C7A-9E3B838BA3A7}" type="slidenum">
+            <a:fld id="{5BDBCBCA-92EB-49BE-BD34-37625F3FF79A}" type="slidenum">
               <a:t>&lt;#&gt;</a:t>
             </a:fld>
           </a:p>
@@ -1614,7 +1614,7 @@
         <p:txBody>
           <a:bodyPr/>
           <a:p>
-            <a:fld id="{AC877F98-E8F0-4BFA-8BFF-28DF41570D07}" type="slidenum">
+            <a:fld id="{8D975B54-5CB7-4319-8327-1A3572244DE1}" type="slidenum">
               <a:t>&lt;#&gt;</a:t>
             </a:fld>
           </a:p>
@@ -1735,7 +1735,7 @@
         <p:txBody>
           <a:bodyPr/>
           <a:p>
-            <a:fld id="{02322E55-00A5-48C3-B149-69A404248395}" type="slidenum">
+            <a:fld id="{370021F0-3D0E-493F-A7C9-B5EAA6E3EED4}" type="slidenum">
               <a:t>&lt;#&gt;</a:t>
             </a:fld>
           </a:p>
@@ -1987,7 +1987,7 @@
         <p:txBody>
           <a:bodyPr/>
           <a:p>
-            <a:fld id="{5E690934-44A7-4669-95E5-D6A33ADCC971}" type="slidenum">
+            <a:fld id="{5BF9B9CA-3ECD-4DEC-8ED8-6502ED79352A}" type="slidenum">
               <a:t>&lt;#&gt;</a:t>
             </a:fld>
           </a:p>
@@ -2239,7 +2239,7 @@
         <p:txBody>
           <a:bodyPr/>
           <a:p>
-            <a:fld id="{6A1DA204-26B4-41C5-90D0-082BF59E61F7}" type="slidenum">
+            <a:fld id="{7C8ABEC1-745A-4E34-A8A4-F6FC50046364}" type="slidenum">
               <a:t>&lt;#&gt;</a:t>
             </a:fld>
           </a:p>
@@ -2491,7 +2491,7 @@
         <p:txBody>
           <a:bodyPr/>
           <a:p>
-            <a:fld id="{38BE94CF-57A1-4804-8B6D-3069EA05C947}" type="slidenum">
+            <a:fld id="{EC856D87-377A-42F2-A5BB-476768F67451}" type="slidenum">
               <a:t>&lt;#&gt;</a:t>
             </a:fld>
           </a:p>
@@ -2976,7 +2976,7 @@
             <a:pPr indent="0" algn="r">
               <a:buNone/>
             </a:pPr>
-            <a:fld id="{05C00500-1543-4F68-9344-9A3F9B9F33EC}" type="slidenum">
+            <a:fld id="{469CCA42-38E3-47B6-88A8-8C48AB45C7F0}" type="slidenum">
               <a:rPr b="0" lang="en-US" sz="1400" spc="-1" strike="noStrike">
                 <a:solidFill>
                   <a:srgbClr val="000000"/>

--- a/fixtures/chapters.pptx
+++ b/fixtures/chapters.pptx
@@ -68,7 +68,7 @@
         <p:txBody>
           <a:bodyPr/>
           <a:p>
-            <a:fld id="{2D420253-7BE9-442B-A436-54F9EC1A68C6}" type="slidenum">
+            <a:fld id="{32DDCA20-5038-474E-9CF9-53DA11EBAED3}" type="slidenum">
               <a:t>&lt;#&gt;</a:t>
             </a:fld>
           </a:p>
@@ -277,7 +277,7 @@
         <p:txBody>
           <a:bodyPr/>
           <a:p>
-            <a:fld id="{C28A1B5F-A184-4AB3-BAB2-B859C5449399}" type="slidenum">
+            <a:fld id="{D72014A4-0C37-4D4D-A9F7-2D6AD520BF92}" type="slidenum">
               <a:t>&lt;#&gt;</a:t>
             </a:fld>
           </a:p>
@@ -572,7 +572,7 @@
         <p:txBody>
           <a:bodyPr/>
           <a:p>
-            <a:fld id="{6D31A1D0-844A-4A64-A35E-B695A9B96993}" type="slidenum">
+            <a:fld id="{63037690-A064-47EA-A67B-21E29F2E3FFA}" type="slidenum">
               <a:t>&lt;#&gt;</a:t>
             </a:fld>
           </a:p>
@@ -953,7 +953,7 @@
         <p:txBody>
           <a:bodyPr/>
           <a:p>
-            <a:fld id="{48720CDC-FDF8-40F1-896D-577B348353EF}" type="slidenum">
+            <a:fld id="{08DF4765-A501-4037-8927-2F6E2C92EA14}" type="slidenum">
               <a:t>&lt;#&gt;</a:t>
             </a:fld>
           </a:p>
@@ -1116,7 +1116,7 @@
         <p:txBody>
           <a:bodyPr/>
           <a:p>
-            <a:fld id="{42E8D436-E4F1-49B2-99A4-87DD16A197CB}" type="slidenum">
+            <a:fld id="{84BA3369-D3DA-472A-B00D-3567639DDBAE}" type="slidenum">
               <a:t>&lt;#&gt;</a:t>
             </a:fld>
           </a:p>
@@ -1282,7 +1282,7 @@
         <p:txBody>
           <a:bodyPr/>
           <a:p>
-            <a:fld id="{B3443551-6A33-43C5-820A-2C3C541187AD}" type="slidenum">
+            <a:fld id="{DF715B58-4698-4CEC-BC28-6C742FD020E2}" type="slidenum">
               <a:t>&lt;#&gt;</a:t>
             </a:fld>
           </a:p>
@@ -1491,7 +1491,7 @@
         <p:txBody>
           <a:bodyPr/>
           <a:p>
-            <a:fld id="{5BDBCBCA-92EB-49BE-BD34-37625F3FF79A}" type="slidenum">
+            <a:fld id="{26D49AAD-A4AA-41F3-B0AF-261131DAC680}" type="slidenum">
               <a:t>&lt;#&gt;</a:t>
             </a:fld>
           </a:p>
@@ -1614,7 +1614,7 @@
         <p:txBody>
           <a:bodyPr/>
           <a:p>
-            <a:fld id="{8D975B54-5CB7-4319-8327-1A3572244DE1}" type="slidenum">
+            <a:fld id="{E7CC0F65-203C-46E2-B823-36571221551E}" type="slidenum">
               <a:t>&lt;#&gt;</a:t>
             </a:fld>
           </a:p>
@@ -1735,7 +1735,7 @@
         <p:txBody>
           <a:bodyPr/>
           <a:p>
-            <a:fld id="{370021F0-3D0E-493F-A7C9-B5EAA6E3EED4}" type="slidenum">
+            <a:fld id="{6731BA6F-B244-4A7B-ADF7-51994851B1E9}" type="slidenum">
               <a:t>&lt;#&gt;</a:t>
             </a:fld>
           </a:p>
@@ -1987,7 +1987,7 @@
         <p:txBody>
           <a:bodyPr/>
           <a:p>
-            <a:fld id="{5BF9B9CA-3ECD-4DEC-8ED8-6502ED79352A}" type="slidenum">
+            <a:fld id="{A6388708-1436-4517-83A7-25AA0F2F74F2}" type="slidenum">
               <a:t>&lt;#&gt;</a:t>
             </a:fld>
           </a:p>
@@ -2239,7 +2239,7 @@
         <p:txBody>
           <a:bodyPr/>
           <a:p>
-            <a:fld id="{7C8ABEC1-745A-4E34-A8A4-F6FC50046364}" type="slidenum">
+            <a:fld id="{F2AEAF0A-9F4D-4E3F-AE6A-A8BB054A085C}" type="slidenum">
               <a:t>&lt;#&gt;</a:t>
             </a:fld>
           </a:p>
@@ -2491,7 +2491,7 @@
         <p:txBody>
           <a:bodyPr/>
           <a:p>
-            <a:fld id="{EC856D87-377A-42F2-A5BB-476768F67451}" type="slidenum">
+            <a:fld id="{0C000D8D-0507-40A4-96AF-6F552F27319C}" type="slidenum">
               <a:t>&lt;#&gt;</a:t>
             </a:fld>
           </a:p>
@@ -2976,7 +2976,7 @@
             <a:pPr indent="0" algn="r">
               <a:buNone/>
             </a:pPr>
-            <a:fld id="{469CCA42-38E3-47B6-88A8-8C48AB45C7F0}" type="slidenum">
+            <a:fld id="{3A8F8F85-7044-4A2B-89CA-6DCC94DE3ADF}" type="slidenum">
               <a:rPr b="0" lang="en-US" sz="1400" spc="-1" strike="noStrike">
                 <a:solidFill>
                   <a:srgbClr val="000000"/>
